--- a/instructors/L5-hardware-efficiency.pptx
+++ b/instructors/L5-hardware-efficiency.pptx
@@ -121,186 +121,30 @@
 </p:presentation>
 </file>
 
-<file path=ppt/revisionInfo.xml><?xml version="1.0" encoding="utf-8"?>
-<p1510:revInfo xmlns:a="http://schemas.openxmlformats.org/drawingml/2006/main" xmlns:r="http://schemas.openxmlformats.org/officeDocument/2006/relationships" xmlns:p1510="http://schemas.microsoft.com/office/powerpoint/2015/10/main">
-  <p1510:revLst>
-    <p1510:client id="{61EF4664-D8A9-AC44-8D01-AFBA4D76DF8E}" v="17" dt="2025-10-07T13:45:52.243"/>
-  </p1510:revLst>
-</p1510:revInfo>
-</file>
-
 <file path=ppt/changesInfos/changesInfo1.xml><?xml version="1.0" encoding="utf-8"?>
 <pc:chgInfo xmlns:a="http://schemas.openxmlformats.org/drawingml/2006/main" xmlns:r="http://schemas.openxmlformats.org/officeDocument/2006/relationships" xmlns:ac="http://schemas.microsoft.com/office/drawing/2013/main/command" xmlns:pc="http://schemas.microsoft.com/office/powerpoint/2013/main/command">
   <pc:docChgLst>
     <pc:chgData name="Andrew Turner" userId="9b60647a-c825-4266-aafa-670849c64782" providerId="ADAL" clId="{292526B5-234E-5EAA-AFB8-0412B8CA4453}"/>
     <pc:docChg chg="custSel addSld modSld modMainMaster">
-      <pc:chgData name="Andrew Turner" userId="9b60647a-c825-4266-aafa-670849c64782" providerId="ADAL" clId="{292526B5-234E-5EAA-AFB8-0412B8CA4453}" dt="2025-10-07T13:45:53.606" v="46" actId="20577"/>
+      <pc:chgData name="Andrew Turner" userId="9b60647a-c825-4266-aafa-670849c64782" providerId="ADAL" clId="{292526B5-234E-5EAA-AFB8-0412B8CA4453}" dt="2026-02-25T21:00:27.211" v="48" actId="58"/>
       <pc:docMkLst>
         <pc:docMk/>
       </pc:docMkLst>
-      <pc:sldChg chg="setBg">
-        <pc:chgData name="Andrew Turner" userId="9b60647a-c825-4266-aafa-670849c64782" providerId="ADAL" clId="{292526B5-234E-5EAA-AFB8-0412B8CA4453}" dt="2025-10-07T13:40:33.768" v="1"/>
+      <pc:sldChg chg="modSp mod">
+        <pc:chgData name="Andrew Turner" userId="9b60647a-c825-4266-aafa-670849c64782" providerId="ADAL" clId="{292526B5-234E-5EAA-AFB8-0412B8CA4453}" dt="2026-02-25T21:00:27.211" v="48" actId="58"/>
         <pc:sldMkLst>
           <pc:docMk/>
-          <pc:sldMk cId="1145753381" sldId="256"/>
-        </pc:sldMkLst>
-      </pc:sldChg>
-      <pc:sldChg chg="modSp mod">
-        <pc:chgData name="Andrew Turner" userId="9b60647a-c825-4266-aafa-670849c64782" providerId="ADAL" clId="{292526B5-234E-5EAA-AFB8-0412B8CA4453}" dt="2025-10-07T13:45:53.606" v="46" actId="20577"/>
-        <pc:sldMkLst>
-          <pc:docMk/>
-          <pc:sldMk cId="1181395689" sldId="258"/>
+          <pc:sldMk cId="3603428592" sldId="260"/>
         </pc:sldMkLst>
         <pc:spChg chg="mod">
-          <ac:chgData name="Andrew Turner" userId="9b60647a-c825-4266-aafa-670849c64782" providerId="ADAL" clId="{292526B5-234E-5EAA-AFB8-0412B8CA4453}" dt="2025-10-07T13:45:53.606" v="46" actId="20577"/>
+          <ac:chgData name="Andrew Turner" userId="9b60647a-c825-4266-aafa-670849c64782" providerId="ADAL" clId="{292526B5-234E-5EAA-AFB8-0412B8CA4453}" dt="2026-02-25T21:00:27.211" v="48" actId="58"/>
           <ac:spMkLst>
             <pc:docMk/>
-            <pc:sldMk cId="1181395689" sldId="258"/>
-            <ac:spMk id="3" creationId="{B8D7C110-210B-A5C7-C413-7B1DF9CBDC8F}"/>
+            <pc:sldMk cId="3603428592" sldId="260"/>
+            <ac:spMk id="6" creationId="{36640C80-DC52-E6C0-A645-19931A8B4F61}"/>
           </ac:spMkLst>
         </pc:spChg>
       </pc:sldChg>
-      <pc:sldChg chg="modSp new mod">
-        <pc:chgData name="Andrew Turner" userId="9b60647a-c825-4266-aafa-670849c64782" providerId="ADAL" clId="{292526B5-234E-5EAA-AFB8-0412B8CA4453}" dt="2025-10-07T13:45:28.171" v="28" actId="20577"/>
-        <pc:sldMkLst>
-          <pc:docMk/>
-          <pc:sldMk cId="2508683781" sldId="265"/>
-        </pc:sldMkLst>
-        <pc:spChg chg="mod">
-          <ac:chgData name="Andrew Turner" userId="9b60647a-c825-4266-aafa-670849c64782" providerId="ADAL" clId="{292526B5-234E-5EAA-AFB8-0412B8CA4453}" dt="2025-10-07T13:40:48.424" v="25" actId="20577"/>
-          <ac:spMkLst>
-            <pc:docMk/>
-            <pc:sldMk cId="2508683781" sldId="265"/>
-            <ac:spMk id="2" creationId="{707A6963-1471-006D-0810-D671AC1A423E}"/>
-          </ac:spMkLst>
-        </pc:spChg>
-        <pc:spChg chg="mod">
-          <ac:chgData name="Andrew Turner" userId="9b60647a-c825-4266-aafa-670849c64782" providerId="ADAL" clId="{292526B5-234E-5EAA-AFB8-0412B8CA4453}" dt="2025-10-07T13:45:28.171" v="28" actId="20577"/>
-          <ac:spMkLst>
-            <pc:docMk/>
-            <pc:sldMk cId="2508683781" sldId="265"/>
-            <ac:spMk id="3" creationId="{E907E41E-0581-82E2-1DDE-14DBFCB2BBFB}"/>
-          </ac:spMkLst>
-        </pc:spChg>
-      </pc:sldChg>
-      <pc:sldChg chg="modSp new mod">
-        <pc:chgData name="Andrew Turner" userId="9b60647a-c825-4266-aafa-670849c64782" providerId="ADAL" clId="{292526B5-234E-5EAA-AFB8-0412B8CA4453}" dt="2025-10-07T13:45:40.367" v="42" actId="20577"/>
-        <pc:sldMkLst>
-          <pc:docMk/>
-          <pc:sldMk cId="4103161271" sldId="266"/>
-        </pc:sldMkLst>
-        <pc:spChg chg="mod">
-          <ac:chgData name="Andrew Turner" userId="9b60647a-c825-4266-aafa-670849c64782" providerId="ADAL" clId="{292526B5-234E-5EAA-AFB8-0412B8CA4453}" dt="2025-10-07T13:45:33.266" v="39" actId="20577"/>
-          <ac:spMkLst>
-            <pc:docMk/>
-            <pc:sldMk cId="4103161271" sldId="266"/>
-            <ac:spMk id="2" creationId="{A93C5A24-C143-B309-6DB2-257443F08193}"/>
-          </ac:spMkLst>
-        </pc:spChg>
-        <pc:spChg chg="mod">
-          <ac:chgData name="Andrew Turner" userId="9b60647a-c825-4266-aafa-670849c64782" providerId="ADAL" clId="{292526B5-234E-5EAA-AFB8-0412B8CA4453}" dt="2025-10-07T13:45:40.367" v="42" actId="20577"/>
-          <ac:spMkLst>
-            <pc:docMk/>
-            <pc:sldMk cId="4103161271" sldId="266"/>
-            <ac:spMk id="3" creationId="{72CD1DD0-79CE-7124-E372-7A4BED869D65}"/>
-          </ac:spMkLst>
-        </pc:spChg>
-      </pc:sldChg>
-      <pc:sldMasterChg chg="setBg modSldLayout">
-        <pc:chgData name="Andrew Turner" userId="9b60647a-c825-4266-aafa-670849c64782" providerId="ADAL" clId="{292526B5-234E-5EAA-AFB8-0412B8CA4453}" dt="2025-10-07T13:40:33.768" v="1"/>
-        <pc:sldMasterMkLst>
-          <pc:docMk/>
-          <pc:sldMasterMk cId="2475188503" sldId="2147483648"/>
-        </pc:sldMasterMkLst>
-        <pc:sldLayoutChg chg="setBg">
-          <pc:chgData name="Andrew Turner" userId="9b60647a-c825-4266-aafa-670849c64782" providerId="ADAL" clId="{292526B5-234E-5EAA-AFB8-0412B8CA4453}" dt="2025-10-07T13:40:33.768" v="1"/>
-          <pc:sldLayoutMkLst>
-            <pc:docMk/>
-            <pc:sldMasterMk cId="2475188503" sldId="2147483648"/>
-            <pc:sldLayoutMk cId="2230135052" sldId="2147483649"/>
-          </pc:sldLayoutMkLst>
-        </pc:sldLayoutChg>
-        <pc:sldLayoutChg chg="setBg">
-          <pc:chgData name="Andrew Turner" userId="9b60647a-c825-4266-aafa-670849c64782" providerId="ADAL" clId="{292526B5-234E-5EAA-AFB8-0412B8CA4453}" dt="2025-10-07T13:40:33.768" v="1"/>
-          <pc:sldLayoutMkLst>
-            <pc:docMk/>
-            <pc:sldMasterMk cId="2475188503" sldId="2147483648"/>
-            <pc:sldLayoutMk cId="2263533210" sldId="2147483650"/>
-          </pc:sldLayoutMkLst>
-        </pc:sldLayoutChg>
-        <pc:sldLayoutChg chg="setBg">
-          <pc:chgData name="Andrew Turner" userId="9b60647a-c825-4266-aafa-670849c64782" providerId="ADAL" clId="{292526B5-234E-5EAA-AFB8-0412B8CA4453}" dt="2025-10-07T13:40:33.768" v="1"/>
-          <pc:sldLayoutMkLst>
-            <pc:docMk/>
-            <pc:sldMasterMk cId="2475188503" sldId="2147483648"/>
-            <pc:sldLayoutMk cId="2236000471" sldId="2147483651"/>
-          </pc:sldLayoutMkLst>
-        </pc:sldLayoutChg>
-        <pc:sldLayoutChg chg="setBg">
-          <pc:chgData name="Andrew Turner" userId="9b60647a-c825-4266-aafa-670849c64782" providerId="ADAL" clId="{292526B5-234E-5EAA-AFB8-0412B8CA4453}" dt="2025-10-07T13:40:33.768" v="1"/>
-          <pc:sldLayoutMkLst>
-            <pc:docMk/>
-            <pc:sldMasterMk cId="2475188503" sldId="2147483648"/>
-            <pc:sldLayoutMk cId="3993702125" sldId="2147483652"/>
-          </pc:sldLayoutMkLst>
-        </pc:sldLayoutChg>
-        <pc:sldLayoutChg chg="setBg">
-          <pc:chgData name="Andrew Turner" userId="9b60647a-c825-4266-aafa-670849c64782" providerId="ADAL" clId="{292526B5-234E-5EAA-AFB8-0412B8CA4453}" dt="2025-10-07T13:40:33.768" v="1"/>
-          <pc:sldLayoutMkLst>
-            <pc:docMk/>
-            <pc:sldMasterMk cId="2475188503" sldId="2147483648"/>
-            <pc:sldLayoutMk cId="1825352401" sldId="2147483653"/>
-          </pc:sldLayoutMkLst>
-        </pc:sldLayoutChg>
-        <pc:sldLayoutChg chg="setBg">
-          <pc:chgData name="Andrew Turner" userId="9b60647a-c825-4266-aafa-670849c64782" providerId="ADAL" clId="{292526B5-234E-5EAA-AFB8-0412B8CA4453}" dt="2025-10-07T13:40:33.768" v="1"/>
-          <pc:sldLayoutMkLst>
-            <pc:docMk/>
-            <pc:sldMasterMk cId="2475188503" sldId="2147483648"/>
-            <pc:sldLayoutMk cId="3090489117" sldId="2147483654"/>
-          </pc:sldLayoutMkLst>
-        </pc:sldLayoutChg>
-        <pc:sldLayoutChg chg="setBg">
-          <pc:chgData name="Andrew Turner" userId="9b60647a-c825-4266-aafa-670849c64782" providerId="ADAL" clId="{292526B5-234E-5EAA-AFB8-0412B8CA4453}" dt="2025-10-07T13:40:33.768" v="1"/>
-          <pc:sldLayoutMkLst>
-            <pc:docMk/>
-            <pc:sldMasterMk cId="2475188503" sldId="2147483648"/>
-            <pc:sldLayoutMk cId="2748089752" sldId="2147483655"/>
-          </pc:sldLayoutMkLst>
-        </pc:sldLayoutChg>
-        <pc:sldLayoutChg chg="setBg">
-          <pc:chgData name="Andrew Turner" userId="9b60647a-c825-4266-aafa-670849c64782" providerId="ADAL" clId="{292526B5-234E-5EAA-AFB8-0412B8CA4453}" dt="2025-10-07T13:40:33.768" v="1"/>
-          <pc:sldLayoutMkLst>
-            <pc:docMk/>
-            <pc:sldMasterMk cId="2475188503" sldId="2147483648"/>
-            <pc:sldLayoutMk cId="133042224" sldId="2147483656"/>
-          </pc:sldLayoutMkLst>
-        </pc:sldLayoutChg>
-        <pc:sldLayoutChg chg="setBg">
-          <pc:chgData name="Andrew Turner" userId="9b60647a-c825-4266-aafa-670849c64782" providerId="ADAL" clId="{292526B5-234E-5EAA-AFB8-0412B8CA4453}" dt="2025-10-07T13:40:33.768" v="1"/>
-          <pc:sldLayoutMkLst>
-            <pc:docMk/>
-            <pc:sldMasterMk cId="2475188503" sldId="2147483648"/>
-            <pc:sldLayoutMk cId="4290204879" sldId="2147483657"/>
-          </pc:sldLayoutMkLst>
-        </pc:sldLayoutChg>
-        <pc:sldLayoutChg chg="setBg">
-          <pc:chgData name="Andrew Turner" userId="9b60647a-c825-4266-aafa-670849c64782" providerId="ADAL" clId="{292526B5-234E-5EAA-AFB8-0412B8CA4453}" dt="2025-10-07T13:40:33.768" v="1"/>
-          <pc:sldLayoutMkLst>
-            <pc:docMk/>
-            <pc:sldMasterMk cId="2475188503" sldId="2147483648"/>
-            <pc:sldLayoutMk cId="3908791262" sldId="2147483658"/>
-          </pc:sldLayoutMkLst>
-        </pc:sldLayoutChg>
-        <pc:sldLayoutChg chg="setBg">
-          <pc:chgData name="Andrew Turner" userId="9b60647a-c825-4266-aafa-670849c64782" providerId="ADAL" clId="{292526B5-234E-5EAA-AFB8-0412B8CA4453}" dt="2025-10-07T13:40:33.768" v="1"/>
-          <pc:sldLayoutMkLst>
-            <pc:docMk/>
-            <pc:sldMasterMk cId="2475188503" sldId="2147483648"/>
-            <pc:sldLayoutMk cId="3069829097" sldId="2147483659"/>
-          </pc:sldLayoutMkLst>
-        </pc:sldLayoutChg>
-      </pc:sldMasterChg>
     </pc:docChg>
   </pc:docChgLst>
 </pc:chgInfo>
@@ -453,7 +297,7 @@
           <a:p>
             <a:fld id="{9ABB4411-DD6B-DB4E-9E48-A9B0A927436B}" type="datetimeFigureOut">
               <a:rPr lang="en-GB" smtClean="0"/>
-              <a:t>07/10/2025</a:t>
+              <a:t>25/02/2026</a:t>
             </a:fld>
             <a:endParaRPr lang="en-GB"/>
           </a:p>
@@ -651,7 +495,7 @@
           <a:p>
             <a:fld id="{9ABB4411-DD6B-DB4E-9E48-A9B0A927436B}" type="datetimeFigureOut">
               <a:rPr lang="en-GB" smtClean="0"/>
-              <a:t>07/10/2025</a:t>
+              <a:t>25/02/2026</a:t>
             </a:fld>
             <a:endParaRPr lang="en-GB"/>
           </a:p>
@@ -859,7 +703,7 @@
           <a:p>
             <a:fld id="{9ABB4411-DD6B-DB4E-9E48-A9B0A927436B}" type="datetimeFigureOut">
               <a:rPr lang="en-GB" smtClean="0"/>
-              <a:t>07/10/2025</a:t>
+              <a:t>25/02/2026</a:t>
             </a:fld>
             <a:endParaRPr lang="en-GB"/>
           </a:p>
@@ -1057,7 +901,7 @@
           <a:p>
             <a:fld id="{9ABB4411-DD6B-DB4E-9E48-A9B0A927436B}" type="datetimeFigureOut">
               <a:rPr lang="en-GB" smtClean="0"/>
-              <a:t>07/10/2025</a:t>
+              <a:t>25/02/2026</a:t>
             </a:fld>
             <a:endParaRPr lang="en-GB"/>
           </a:p>
@@ -1332,7 +1176,7 @@
           <a:p>
             <a:fld id="{9ABB4411-DD6B-DB4E-9E48-A9B0A927436B}" type="datetimeFigureOut">
               <a:rPr lang="en-GB" smtClean="0"/>
-              <a:t>07/10/2025</a:t>
+              <a:t>25/02/2026</a:t>
             </a:fld>
             <a:endParaRPr lang="en-GB"/>
           </a:p>
@@ -1597,7 +1441,7 @@
           <a:p>
             <a:fld id="{9ABB4411-DD6B-DB4E-9E48-A9B0A927436B}" type="datetimeFigureOut">
               <a:rPr lang="en-GB" smtClean="0"/>
-              <a:t>07/10/2025</a:t>
+              <a:t>25/02/2026</a:t>
             </a:fld>
             <a:endParaRPr lang="en-GB"/>
           </a:p>
@@ -2009,7 +1853,7 @@
           <a:p>
             <a:fld id="{9ABB4411-DD6B-DB4E-9E48-A9B0A927436B}" type="datetimeFigureOut">
               <a:rPr lang="en-GB" smtClean="0"/>
-              <a:t>07/10/2025</a:t>
+              <a:t>25/02/2026</a:t>
             </a:fld>
             <a:endParaRPr lang="en-GB"/>
           </a:p>
@@ -2150,7 +1994,7 @@
           <a:p>
             <a:fld id="{9ABB4411-DD6B-DB4E-9E48-A9B0A927436B}" type="datetimeFigureOut">
               <a:rPr lang="en-GB" smtClean="0"/>
-              <a:t>07/10/2025</a:t>
+              <a:t>25/02/2026</a:t>
             </a:fld>
             <a:endParaRPr lang="en-GB"/>
           </a:p>
@@ -2263,7 +2107,7 @@
           <a:p>
             <a:fld id="{9ABB4411-DD6B-DB4E-9E48-A9B0A927436B}" type="datetimeFigureOut">
               <a:rPr lang="en-GB" smtClean="0"/>
-              <a:t>07/10/2025</a:t>
+              <a:t>25/02/2026</a:t>
             </a:fld>
             <a:endParaRPr lang="en-GB"/>
           </a:p>
@@ -2574,7 +2418,7 @@
           <a:p>
             <a:fld id="{9ABB4411-DD6B-DB4E-9E48-A9B0A927436B}" type="datetimeFigureOut">
               <a:rPr lang="en-GB" smtClean="0"/>
-              <a:t>07/10/2025</a:t>
+              <a:t>25/02/2026</a:t>
             </a:fld>
             <a:endParaRPr lang="en-GB"/>
           </a:p>
@@ -2862,7 +2706,7 @@
           <a:p>
             <a:fld id="{9ABB4411-DD6B-DB4E-9E48-A9B0A927436B}" type="datetimeFigureOut">
               <a:rPr lang="en-GB" smtClean="0"/>
-              <a:t>07/10/2025</a:t>
+              <a:t>25/02/2026</a:t>
             </a:fld>
             <a:endParaRPr lang="en-GB"/>
           </a:p>
@@ -3106,7 +2950,7 @@
           <a:p>
             <a:fld id="{9ABB4411-DD6B-DB4E-9E48-A9B0A927436B}" type="datetimeFigureOut">
               <a:rPr lang="en-GB" smtClean="0"/>
-              <a:t>07/10/2025</a:t>
+              <a:t>25/02/2026</a:t>
             </a:fld>
             <a:endParaRPr lang="en-GB"/>
           </a:p>
@@ -4168,7 +4012,47 @@
                 <a:effectLst/>
                 <a:latin typeface="Gilroy-Regular"/>
               </a:rPr>
-              <a:t>Suppose it took 4000 kgCO2e to build an HPC system, and we expect it to last 4 years. We can amortise this to say the HPC system emits 1000 kgCO2e/year</a:t>
+              <a:t>Suppose it took 4000 kgCO</a:t>
+            </a:r>
+            <a:r>
+              <a:rPr lang="en-GB" b="0" i="0" baseline="-25000" dirty="0">
+                <a:solidFill>
+                  <a:srgbClr val="000000"/>
+                </a:solidFill>
+                <a:effectLst/>
+                <a:latin typeface="Gilroy-Regular"/>
+              </a:rPr>
+              <a:t>2</a:t>
+            </a:r>
+            <a:r>
+              <a:rPr lang="en-GB" b="0" i="0" dirty="0">
+                <a:solidFill>
+                  <a:srgbClr val="000000"/>
+                </a:solidFill>
+                <a:effectLst/>
+                <a:latin typeface="Gilroy-Regular"/>
+              </a:rPr>
+              <a:t>e to build an HPC system, and we expect it to last 4 years. We can amortise this to say the HPC system emits 1000 kgCO</a:t>
+            </a:r>
+            <a:r>
+              <a:rPr lang="en-GB" b="0" i="0" baseline="-25000" dirty="0">
+                <a:solidFill>
+                  <a:srgbClr val="000000"/>
+                </a:solidFill>
+                <a:effectLst/>
+                <a:latin typeface="Gilroy-Regular"/>
+              </a:rPr>
+              <a:t>2</a:t>
+            </a:r>
+            <a:r>
+              <a:rPr lang="en-GB" b="0" i="0" dirty="0">
+                <a:solidFill>
+                  <a:srgbClr val="000000"/>
+                </a:solidFill>
+                <a:effectLst/>
+                <a:latin typeface="Gilroy-Regular"/>
+              </a:rPr>
+              <a:t>e/year</a:t>
             </a:r>
           </a:p>
           <a:p>
